--- a/slides/05_Choosing_Columns_and_Rows.pptx
+++ b/slides/05_Choosing_Columns_and_Rows.pptx
@@ -131,7 +131,7 @@
   <p:extLst>
     <p:ext uri="{521415D9-36F7-43E2-AB2F-B90AF26B5E84}">
       <p14:sectionLst xmlns:p14="http://schemas.microsoft.com/office/powerpoint/2010/main">
-        <p14:section name="Introduction" id="{8977fe99-f6a1-fab7-bd6e-619bfa82a742}">
+        <p14:section name="Introduction" id="{7fd583b2-2bf4-ee35-9eaa-ec90c2b44e20}">
           <p14:sldIdLst>
             <p14:sldId id="256"/>
             <p14:sldId id="257"/>
@@ -139,7 +139,7 @@
             <p14:sldId id="259"/>
           </p14:sldIdLst>
         </p14:section>
-        <p14:section name="Choosing columns" id="{2572515c-01cc-1f28-45a7-1ea1fc960f55}">
+        <p14:section name="Choosing columns" id="{13df2c1b-91e0-1a4c-8d7c-3ce7608aefe5}">
           <p14:sldIdLst>
             <p14:sldId id="260"/>
             <p14:sldId id="261"/>
@@ -148,14 +148,14 @@
             <p14:sldId id="264"/>
           </p14:sldIdLst>
         </p14:section>
-        <p14:section name="Choosing rows" id="{94ac2811-bf96-482b-0a9d-3d56b50d1f34}">
+        <p14:section name="Choosing rows" id="{7ead3a7c-a11a-2d80-74ec-2885e455f7b7}">
           <p14:sldIdLst>
             <p14:sldId id="265"/>
             <p14:sldId id="266"/>
             <p14:sldId id="267"/>
           </p14:sldIdLst>
         </p14:section>
-        <p14:section name="Combining conditions" id="{b30fee79-3329-0e04-821a-f1fdcf5f7113}">
+        <p14:section name="Combining conditions" id="{f9797364-6fde-d64c-6994-5f1e960ac7f4}">
           <p14:sldIdLst>
             <p14:sldId id="268"/>
             <p14:sldId id="269"/>
@@ -167,14 +167,14 @@
             <p14:sldId id="275"/>
           </p14:sldIdLst>
         </p14:section>
-        <p14:section name="Finding the Indie games" id="{25e71df0-82aa-af17-2833-0dd4e67f700d}">
+        <p14:section name="Finding the Indie games" id="{e099f116-ccfa-8ea4-34bb-544d45389c39}">
           <p14:sldIdLst>
             <p14:sldId id="276"/>
             <p14:sldId id="277"/>
             <p14:sldId id="278"/>
           </p14:sldIdLst>
         </p14:section>
-        <p14:section name="Wrap up" id="{4dd94a7f-d358-2110-4839-71eff475b026}">
+        <p14:section name="Wrap up" id="{61de450b-970b-b7b2-4c8f-af8212b7899c}">
           <p14:sldIdLst>
             <p14:sldId id="279"/>
             <p14:sldId id="280"/>
@@ -3626,7 +3626,7 @@
               <a:t>To keep only some rows, we use </a:t>
             </a:r>
             <a:r>
-              <a:rPr lang="en-US" sz="1600" dirty="0">
+              <a:rPr lang="en-US" sz="1600" b="1" dirty="0">
                 <a:solidFill>
                   <a:srgbClr val="E8A55A"/>
                 </a:solidFill>
@@ -3645,7 +3645,7 @@
               <a:t> with a condition. Rows where the condition is </a:t>
             </a:r>
             <a:r>
-              <a:rPr lang="en-US" sz="1600" dirty="0">
+              <a:rPr lang="en-US" sz="1600" b="1" dirty="0">
                 <a:solidFill>
                   <a:srgbClr val="E8A55A"/>
                 </a:solidFill>
@@ -4181,7 +4181,7 @@
               <a:t>Free games might behave differently from paid games, so it's worth knowing how many there are. We keep only the rows where </a:t>
             </a:r>
             <a:r>
-              <a:rPr lang="en-US" sz="1300" dirty="0">
+              <a:rPr lang="en-US" sz="1300" b="1" dirty="0">
                 <a:solidFill>
                   <a:srgbClr val="B86E1E"/>
                 </a:solidFill>
@@ -4422,7 +4422,7 @@
               <a:t>Change </a:t>
             </a:r>
             <a:r>
-              <a:rPr lang="en-US" sz="1800" dirty="0">
+              <a:rPr lang="en-US" sz="1800" b="1" dirty="0">
                 <a:solidFill>
                   <a:srgbClr val="B86E1E"/>
                 </a:solidFill>
@@ -4441,7 +4441,7 @@
               <a:t> to </a:t>
             </a:r>
             <a:r>
-              <a:rPr lang="en-US" sz="1800" dirty="0">
+              <a:rPr lang="en-US" sz="1800" b="1" dirty="0">
                 <a:solidFill>
                   <a:srgbClr val="B86E1E"/>
                 </a:solidFill>
@@ -4642,7 +4642,7 @@
               <a:t>Paid games that are also very popular: </a:t>
             </a:r>
             <a:r>
-              <a:rPr lang="en-US" sz="1600" dirty="0">
+              <a:rPr lang="en-US" sz="1600" b="1" dirty="0">
                 <a:solidFill>
                   <a:srgbClr val="E8A55A"/>
                 </a:solidFill>
@@ -4677,7 +4677,7 @@
               <a:t> </a:t>
             </a:r>
             <a:r>
-              <a:rPr lang="en-US" sz="1600" dirty="0">
+              <a:rPr lang="en-US" sz="1600" b="1" dirty="0">
                 <a:solidFill>
                   <a:srgbClr val="E8A55A"/>
                 </a:solidFill>
@@ -5070,7 +5070,7 @@
               <a:t> We say a game is very popular if it has more than 10,000 recommendations. A row has to pass both conditions, so we join them with </a:t>
             </a:r>
             <a:r>
-              <a:rPr lang="en-US" sz="1300" dirty="0">
+              <a:rPr lang="en-US" sz="1300" b="1" dirty="0">
                 <a:solidFill>
                   <a:srgbClr val="B86E1E"/>
                 </a:solidFill>
@@ -5342,7 +5342,7 @@
               <a:t> → Python tried to treat an expression as a single </a:t>
             </a:r>
             <a:r>
-              <a:rPr lang="en-US" sz="1100" dirty="0">
+              <a:rPr lang="en-US" sz="1100" b="1" dirty="0">
                 <a:solidFill>
                   <a:srgbClr val="B86E1E"/>
                 </a:solidFill>
@@ -5361,7 +5361,7 @@
               <a:t> or </a:t>
             </a:r>
             <a:r>
-              <a:rPr lang="en-US" sz="1100" dirty="0">
+              <a:rPr lang="en-US" sz="1100" b="1" dirty="0">
                 <a:solidFill>
                   <a:srgbClr val="B86E1E"/>
                 </a:solidFill>
@@ -5406,7 +5406,7 @@
               <a:t> → Python couldn't decide if it was </a:t>
             </a:r>
             <a:r>
-              <a:rPr lang="en-US" sz="1100" dirty="0">
+              <a:rPr lang="en-US" sz="1100" b="1" dirty="0">
                 <a:solidFill>
                   <a:srgbClr val="B86E1E"/>
                 </a:solidFill>
@@ -5425,7 +5425,7 @@
               <a:t> or </a:t>
             </a:r>
             <a:r>
-              <a:rPr lang="en-US" sz="1100" dirty="0">
+              <a:rPr lang="en-US" sz="1100" b="1" dirty="0">
                 <a:solidFill>
                   <a:srgbClr val="B86E1E"/>
                 </a:solidFill>
@@ -5504,7 +5504,7 @@
               <a:t> → common causes, such as </a:t>
             </a:r>
             <a:r>
-              <a:rPr lang="en-US" sz="1100" dirty="0">
+              <a:rPr lang="en-US" sz="1100" b="1" dirty="0">
                 <a:solidFill>
                   <a:srgbClr val="B86E1E"/>
                 </a:solidFill>
@@ -5523,7 +5523,7 @@
               <a:t> instead of </a:t>
             </a:r>
             <a:r>
-              <a:rPr lang="en-US" sz="1100" dirty="0">
+              <a:rPr lang="en-US" sz="1100" b="1" dirty="0">
                 <a:solidFill>
                   <a:srgbClr val="B86E1E"/>
                 </a:solidFill>
@@ -5542,7 +5542,7 @@
               <a:t>. We already use </a:t>
             </a:r>
             <a:r>
-              <a:rPr lang="en-US" sz="1100" dirty="0">
+              <a:rPr lang="en-US" sz="1100" b="1" dirty="0">
                 <a:solidFill>
                   <a:srgbClr val="B86E1E"/>
                 </a:solidFill>
@@ -5719,7 +5719,7 @@
               <a:t>Python does </a:t>
             </a:r>
             <a:r>
-              <a:rPr lang="en-US" sz="1500" dirty="0">
+              <a:rPr lang="en-US" sz="1500" b="1" dirty="0">
                 <a:solidFill>
                   <a:srgbClr val="B86E1E"/>
                 </a:solidFill>
@@ -5754,7 +5754,7 @@
               <a:t> </a:t>
             </a:r>
             <a:r>
-              <a:rPr lang="en-US" sz="1500" dirty="0">
+              <a:rPr lang="en-US" sz="1500" b="1" dirty="0">
                 <a:solidFill>
                   <a:srgbClr val="B86E1E"/>
                 </a:solidFill>
@@ -5791,7 +5791,7 @@
               <a:t>so it tried to work out </a:t>
             </a:r>
             <a:r>
-              <a:rPr lang="en-US" sz="1500" dirty="0">
+              <a:rPr lang="en-US" sz="1500" b="1" dirty="0">
                 <a:solidFill>
                   <a:srgbClr val="B86E1E"/>
                 </a:solidFill>
@@ -6343,7 +6343,7 @@
               <a:t> → each condition in its own brackets, joined with </a:t>
             </a:r>
             <a:r>
-              <a:rPr lang="en-US" sz="1300" dirty="0">
+              <a:rPr lang="en-US" sz="1300" b="1" dirty="0">
                 <a:solidFill>
                   <a:srgbClr val="B86E1E"/>
                 </a:solidFill>
@@ -6396,7 +6396,7 @@
               <a:t> conditions are </a:t>
             </a:r>
             <a:r>
-              <a:rPr lang="en-US" sz="1300" dirty="0">
+              <a:rPr lang="en-US" sz="1300" b="1" dirty="0">
                 <a:solidFill>
                   <a:srgbClr val="B86E1E"/>
                 </a:solidFill>
@@ -7578,7 +7578,7 @@
               <a:t>In normal Python we write </a:t>
             </a:r>
             <a:r>
-              <a:rPr lang="en-US" sz="1800" dirty="0">
+              <a:rPr lang="en-US" sz="1800" b="1" dirty="0">
                 <a:solidFill>
                   <a:srgbClr val="B86E1E"/>
                 </a:solidFill>
@@ -7597,7 +7597,7 @@
               <a:t> and </a:t>
             </a:r>
             <a:r>
-              <a:rPr lang="en-US" sz="1800" dirty="0">
+              <a:rPr lang="en-US" sz="1800" b="1" dirty="0">
                 <a:solidFill>
                   <a:srgbClr val="B86E1E"/>
                 </a:solidFill>
@@ -7616,7 +7616,7 @@
               <a:t>. Polars expressions need </a:t>
             </a:r>
             <a:r>
-              <a:rPr lang="en-US" sz="1800" dirty="0">
+              <a:rPr lang="en-US" sz="1800" b="1" dirty="0">
                 <a:solidFill>
                   <a:srgbClr val="B86E1E"/>
                 </a:solidFill>
@@ -7635,7 +7635,7 @@
               <a:t> and </a:t>
             </a:r>
             <a:r>
-              <a:rPr lang="en-US" sz="1800" dirty="0">
+              <a:rPr lang="en-US" sz="1800" b="1" dirty="0">
                 <a:solidFill>
                   <a:srgbClr val="B86E1E"/>
                 </a:solidFill>
@@ -7901,7 +7901,7 @@
               <a:t>how to keep only the columns we need with </a:t>
             </a:r>
             <a:r>
-              <a:rPr lang="en-US" sz="1800" dirty="0">
+              <a:rPr lang="en-US" sz="1800" b="1" dirty="0">
                 <a:solidFill>
                   <a:srgbClr val="B86E1E"/>
                 </a:solidFill>
@@ -7938,7 +7938,7 @@
               <a:t>how to keep only the rows we need with </a:t>
             </a:r>
             <a:r>
-              <a:rPr lang="en-US" sz="1800" dirty="0">
+              <a:rPr lang="en-US" sz="1800" b="1" dirty="0">
                 <a:solidFill>
                   <a:srgbClr val="B86E1E"/>
                 </a:solidFill>
@@ -7975,7 +7975,7 @@
               <a:t>how to combine conditions with </a:t>
             </a:r>
             <a:r>
-              <a:rPr lang="en-US" sz="1800" dirty="0">
+              <a:rPr lang="en-US" sz="1800" b="1" dirty="0">
                 <a:solidFill>
                   <a:srgbClr val="B86E1E"/>
                 </a:solidFill>
@@ -7994,7 +7994,7 @@
               <a:t> and </a:t>
             </a:r>
             <a:r>
-              <a:rPr lang="en-US" sz="1800" dirty="0">
+              <a:rPr lang="en-US" sz="1800" b="1" dirty="0">
                 <a:solidFill>
                   <a:srgbClr val="B86E1E"/>
                 </a:solidFill>
@@ -8451,7 +8451,7 @@
               <a:t>We counted the Indie games with </a:t>
             </a:r>
             <a:r>
-              <a:rPr lang="en-US" sz="1600" dirty="0">
+              <a:rPr lang="en-US" sz="1600" b="1" dirty="0">
                 <a:solidFill>
                   <a:srgbClr val="E8A55A"/>
                 </a:solidFill>
@@ -8782,7 +8782,7 @@
               <a:t> We use the same </a:t>
             </a:r>
             <a:r>
-              <a:rPr lang="en-US" sz="1300" dirty="0">
+              <a:rPr lang="en-US" sz="1300" b="1" dirty="0">
                 <a:solidFill>
                   <a:srgbClr val="B86E1E"/>
                 </a:solidFill>
@@ -8801,7 +8801,7 @@
               <a:t> condition as before, but inside a </a:t>
             </a:r>
             <a:r>
-              <a:rPr lang="en-US" sz="1300" dirty="0">
+              <a:rPr lang="en-US" sz="1300" b="1" dirty="0">
                 <a:solidFill>
                   <a:srgbClr val="B86E1E"/>
                 </a:solidFill>
@@ -9062,7 +9062,7 @@
               <a:t>every row has </a:t>
             </a:r>
             <a:r>
-              <a:rPr lang="en-US" sz="1300" dirty="0">
+              <a:rPr lang="en-US" sz="1300" b="1" dirty="0">
                 <a:solidFill>
                   <a:srgbClr val="B86E1E"/>
                 </a:solidFill>
@@ -9081,7 +9081,7 @@
               <a:t> somewhere in its </a:t>
             </a:r>
             <a:r>
-              <a:rPr lang="en-US" sz="1300" dirty="0">
+              <a:rPr lang="en-US" sz="1300" b="1" dirty="0">
                 <a:solidFill>
                   <a:srgbClr val="B86E1E"/>
                 </a:solidFill>
@@ -9276,7 +9276,7 @@
               <a:t>Why does </a:t>
             </a:r>
             <a:r>
-              <a:rPr lang="en-US" sz="1800" dirty="0">
+              <a:rPr lang="en-US" sz="1800" b="1" dirty="0">
                 <a:solidFill>
                   <a:srgbClr val="E8A55A"/>
                 </a:solidFill>
@@ -9322,7 +9322,7 @@
               <a:t>Why did our first </a:t>
             </a:r>
             <a:r>
-              <a:rPr lang="en-US" sz="1800" dirty="0">
+              <a:rPr lang="en-US" sz="1800" b="1" dirty="0">
                 <a:solidFill>
                   <a:srgbClr val="E8A55A"/>
                 </a:solidFill>
@@ -9631,7 +9631,7 @@
               <a:t>List the columns your question needs and why. If any aren't in </a:t>
             </a:r>
             <a:r>
-              <a:rPr lang="en-US" sz="1400" dirty="0">
+              <a:rPr lang="en-US" sz="1400" b="1" dirty="0">
                 <a:solidFill>
                   <a:srgbClr val="B86E1E"/>
                 </a:solidFill>
@@ -9650,7 +9650,7 @@
               <a:t>, add them to the </a:t>
             </a:r>
             <a:r>
-              <a:rPr lang="en-US" sz="1400" dirty="0">
+              <a:rPr lang="en-US" sz="1400" b="1" dirty="0">
                 <a:solidFill>
                   <a:srgbClr val="B86E1E"/>
                 </a:solidFill>
@@ -9696,7 +9696,7 @@
               <a:t>Write a </a:t>
             </a:r>
             <a:r>
-              <a:rPr lang="en-US" sz="1400" dirty="0">
+              <a:rPr lang="en-US" sz="1400" b="1" dirty="0">
                 <a:solidFill>
                   <a:srgbClr val="B86E1E"/>
                 </a:solidFill>
@@ -9742,7 +9742,7 @@
               <a:t>If your question compares two groups, write one </a:t>
             </a:r>
             <a:r>
-              <a:rPr lang="en-US" sz="1400" dirty="0">
+              <a:rPr lang="en-US" sz="1400" b="1" dirty="0">
                 <a:solidFill>
                   <a:srgbClr val="B86E1E"/>
                 </a:solidFill>
@@ -10024,7 +10024,7 @@
               <a:t> – a description of what to do with a column, such as </a:t>
             </a:r>
             <a:r>
-              <a:rPr lang="en-US" sz="1800" dirty="0">
+              <a:rPr lang="en-US" sz="1800" b="1" dirty="0">
                 <a:solidFill>
                   <a:srgbClr val="B86E1E"/>
                 </a:solidFill>
@@ -14020,7 +14020,7 @@
               <a:t>​</a:t>
             </a:r>
             <a:r>
-              <a:rPr lang="en-US" sz="1300" dirty="0">
+              <a:rPr lang="en-US" sz="1300" b="1" dirty="0">
                 <a:solidFill>
                   <a:srgbClr val="B86E1E"/>
                 </a:solidFill>
@@ -14039,7 +14039,7 @@
               <a:t> keeps just the columns we list, in the order we list them. We store the result in a new variable, </a:t>
             </a:r>
             <a:r>
-              <a:rPr lang="en-US" sz="1300" dirty="0">
+              <a:rPr lang="en-US" sz="1300" b="1" dirty="0">
                 <a:solidFill>
                   <a:srgbClr val="B86E1E"/>
                 </a:solidFill>
@@ -14220,7 +14220,7 @@
               <a:t>so </a:t>
             </a:r>
             <a:r>
-              <a:rPr lang="en-US" sz="1200" dirty="0">
+              <a:rPr lang="en-US" sz="1200" b="1" dirty="0">
                 <a:solidFill>
                   <a:srgbClr val="B86E1E"/>
                 </a:solidFill>
@@ -14459,7 +14459,7 @@
               <a:t>Our example question doesn't need them, but your own question might. Do games with more achievements get more recommendations? Do games from publishers that release lots of games get better reviews? If your question uses them, add them to your </a:t>
             </a:r>
             <a:r>
-              <a:rPr lang="en-US" sz="1800" dirty="0">
+              <a:rPr lang="en-US" sz="1800" b="1" dirty="0">
                 <a:solidFill>
                   <a:srgbClr val="B86E1E"/>
                 </a:solidFill>
